--- a/public/videos/repositories/wedding-hall-map/wedding-hall-map-tech-preview.pptx
+++ b/public/videos/repositories/wedding-hall-map/wedding-hall-map-tech-preview.pptx
@@ -134,7 +134,7 @@
           <p:cNvPr id="2" name="タイトル 1">
             <a:extLst>
               <a:ext uri="{FF2B5EF4-FFF2-40B4-BE49-F238E27FC236}">
-                <a16:creationId xmlns:a16="http://schemas.microsoft.com/office/drawing/2014/main" id="{FDD9F61A-748F-CF76-D6C2-79AD798FCBB0}"/>
+                <a16:creationId xmlns:a16="http://schemas.microsoft.com/office/drawing/2014/main" id="{018FEF34-42E7-6C89-BF91-D85F1538B218}"/>
               </a:ext>
             </a:extLst>
           </p:cNvPr>
@@ -171,7 +171,7 @@
           <p:cNvPr id="3" name="字幕 2">
             <a:extLst>
               <a:ext uri="{FF2B5EF4-FFF2-40B4-BE49-F238E27FC236}">
-                <a16:creationId xmlns:a16="http://schemas.microsoft.com/office/drawing/2014/main" id="{F5B1D952-9FD7-1D87-1394-C8E43AEFCDFB}"/>
+                <a16:creationId xmlns:a16="http://schemas.microsoft.com/office/drawing/2014/main" id="{5C7E1014-AFDD-066B-00AB-36EB4EDC83EE}"/>
               </a:ext>
             </a:extLst>
           </p:cNvPr>
@@ -241,7 +241,7 @@
           <p:cNvPr id="4" name="日付プレースホルダー 3">
             <a:extLst>
               <a:ext uri="{FF2B5EF4-FFF2-40B4-BE49-F238E27FC236}">
-                <a16:creationId xmlns:a16="http://schemas.microsoft.com/office/drawing/2014/main" id="{9F6D9097-5ABF-86F2-A723-AA69A05B9201}"/>
+                <a16:creationId xmlns:a16="http://schemas.microsoft.com/office/drawing/2014/main" id="{8B3ADE0D-58D2-98EB-D4C9-1BEE66FBE095}"/>
               </a:ext>
             </a:extLst>
           </p:cNvPr>
@@ -257,7 +257,7 @@
           <a:bodyPr/>
           <a:lstStyle/>
           <a:p>
-            <a:fld id="{57300885-F7E3-44C8-81FD-6EEE2CA91821}" type="datetimeFigureOut">
+            <a:fld id="{FE270A2D-177A-41EB-8689-FF0085125FA0}" type="datetimeFigureOut">
               <a:rPr kumimoji="1" lang="ja-JP" altLang="en-US" smtClean="0"/>
               <a:t>2026/7/30</a:t>
             </a:fld>
@@ -270,7 +270,7 @@
           <p:cNvPr id="5" name="フッター プレースホルダー 4">
             <a:extLst>
               <a:ext uri="{FF2B5EF4-FFF2-40B4-BE49-F238E27FC236}">
-                <a16:creationId xmlns:a16="http://schemas.microsoft.com/office/drawing/2014/main" id="{3D025EDE-0C10-4A5C-FBC4-E3327A15CCC1}"/>
+                <a16:creationId xmlns:a16="http://schemas.microsoft.com/office/drawing/2014/main" id="{27A8487C-C38C-99EF-5A8C-0A44060250CC}"/>
               </a:ext>
             </a:extLst>
           </p:cNvPr>
@@ -295,7 +295,7 @@
           <p:cNvPr id="6" name="スライド番号プレースホルダー 5">
             <a:extLst>
               <a:ext uri="{FF2B5EF4-FFF2-40B4-BE49-F238E27FC236}">
-                <a16:creationId xmlns:a16="http://schemas.microsoft.com/office/drawing/2014/main" id="{E22ED207-68B0-39E4-1185-A4C193A86709}"/>
+                <a16:creationId xmlns:a16="http://schemas.microsoft.com/office/drawing/2014/main" id="{A7970144-1C5F-2C42-7FFC-56A9321122B2}"/>
               </a:ext>
             </a:extLst>
           </p:cNvPr>
@@ -311,7 +311,7 @@
           <a:bodyPr/>
           <a:lstStyle/>
           <a:p>
-            <a:fld id="{CA3C3399-F037-41EE-9269-792D2EBAF5B2}" type="slidenum">
+            <a:fld id="{5F55CA0D-5453-4F13-A461-CCCDD36BBF48}" type="slidenum">
               <a:rPr kumimoji="1" lang="ja-JP" altLang="en-US" smtClean="0"/>
               <a:t>‹#›</a:t>
             </a:fld>
@@ -322,7 +322,7 @@
     </p:spTree>
     <p:extLst>
       <p:ext uri="{BB962C8B-B14F-4D97-AF65-F5344CB8AC3E}">
-        <p14:creationId xmlns:p14="http://schemas.microsoft.com/office/powerpoint/2010/main" val="489115680"/>
+        <p14:creationId xmlns:p14="http://schemas.microsoft.com/office/powerpoint/2010/main" val="2077021116"/>
       </p:ext>
     </p:extLst>
   </p:cSld>
@@ -354,7 +354,7 @@
           <p:cNvPr id="2" name="タイトル 1">
             <a:extLst>
               <a:ext uri="{FF2B5EF4-FFF2-40B4-BE49-F238E27FC236}">
-                <a16:creationId xmlns:a16="http://schemas.microsoft.com/office/drawing/2014/main" id="{2FD0143D-386F-C350-F901-3AF12F4B2599}"/>
+                <a16:creationId xmlns:a16="http://schemas.microsoft.com/office/drawing/2014/main" id="{4AD780D0-DB0A-A9BA-3BB2-363F9A2B1621}"/>
               </a:ext>
             </a:extLst>
           </p:cNvPr>
@@ -382,7 +382,7 @@
           <p:cNvPr id="3" name="縦書きテキスト プレースホルダー 2">
             <a:extLst>
               <a:ext uri="{FF2B5EF4-FFF2-40B4-BE49-F238E27FC236}">
-                <a16:creationId xmlns:a16="http://schemas.microsoft.com/office/drawing/2014/main" id="{5C5E55C5-C880-018D-B829-3BD4C44614B4}"/>
+                <a16:creationId xmlns:a16="http://schemas.microsoft.com/office/drawing/2014/main" id="{B92F2258-4814-19D0-64CD-F4FDD42E7D70}"/>
               </a:ext>
             </a:extLst>
           </p:cNvPr>
@@ -471,7 +471,7 @@
           <p:cNvPr id="4" name="日付プレースホルダー 3">
             <a:extLst>
               <a:ext uri="{FF2B5EF4-FFF2-40B4-BE49-F238E27FC236}">
-                <a16:creationId xmlns:a16="http://schemas.microsoft.com/office/drawing/2014/main" id="{75097122-F97E-1B4B-AC7C-615CB343F4AA}"/>
+                <a16:creationId xmlns:a16="http://schemas.microsoft.com/office/drawing/2014/main" id="{212D6F0C-6B69-78B4-DD7D-B74606558A71}"/>
               </a:ext>
             </a:extLst>
           </p:cNvPr>
@@ -487,7 +487,7 @@
           <a:bodyPr/>
           <a:lstStyle/>
           <a:p>
-            <a:fld id="{57300885-F7E3-44C8-81FD-6EEE2CA91821}" type="datetimeFigureOut">
+            <a:fld id="{FE270A2D-177A-41EB-8689-FF0085125FA0}" type="datetimeFigureOut">
               <a:rPr kumimoji="1" lang="ja-JP" altLang="en-US" smtClean="0"/>
               <a:t>2026/7/30</a:t>
             </a:fld>
@@ -500,7 +500,7 @@
           <p:cNvPr id="5" name="フッター プレースホルダー 4">
             <a:extLst>
               <a:ext uri="{FF2B5EF4-FFF2-40B4-BE49-F238E27FC236}">
-                <a16:creationId xmlns:a16="http://schemas.microsoft.com/office/drawing/2014/main" id="{B9507C9B-F0A2-5CCF-169F-2778CFB05477}"/>
+                <a16:creationId xmlns:a16="http://schemas.microsoft.com/office/drawing/2014/main" id="{6838F073-D0F0-8850-F97D-C2EB5B71A896}"/>
               </a:ext>
             </a:extLst>
           </p:cNvPr>
@@ -525,7 +525,7 @@
           <p:cNvPr id="6" name="スライド番号プレースホルダー 5">
             <a:extLst>
               <a:ext uri="{FF2B5EF4-FFF2-40B4-BE49-F238E27FC236}">
-                <a16:creationId xmlns:a16="http://schemas.microsoft.com/office/drawing/2014/main" id="{C1594E48-8789-98F9-0301-A40A15617229}"/>
+                <a16:creationId xmlns:a16="http://schemas.microsoft.com/office/drawing/2014/main" id="{FF5A0E2D-D1B6-0E73-458D-BC90FD0DD824}"/>
               </a:ext>
             </a:extLst>
           </p:cNvPr>
@@ -541,7 +541,7 @@
           <a:bodyPr/>
           <a:lstStyle/>
           <a:p>
-            <a:fld id="{CA3C3399-F037-41EE-9269-792D2EBAF5B2}" type="slidenum">
+            <a:fld id="{5F55CA0D-5453-4F13-A461-CCCDD36BBF48}" type="slidenum">
               <a:rPr kumimoji="1" lang="ja-JP" altLang="en-US" smtClean="0"/>
               <a:t>‹#›</a:t>
             </a:fld>
@@ -552,7 +552,7 @@
     </p:spTree>
     <p:extLst>
       <p:ext uri="{BB962C8B-B14F-4D97-AF65-F5344CB8AC3E}">
-        <p14:creationId xmlns:p14="http://schemas.microsoft.com/office/powerpoint/2010/main" val="3090509451"/>
+        <p14:creationId xmlns:p14="http://schemas.microsoft.com/office/powerpoint/2010/main" val="3733374442"/>
       </p:ext>
     </p:extLst>
   </p:cSld>
@@ -584,7 +584,7 @@
           <p:cNvPr id="2" name="縦書きタイトル 1">
             <a:extLst>
               <a:ext uri="{FF2B5EF4-FFF2-40B4-BE49-F238E27FC236}">
-                <a16:creationId xmlns:a16="http://schemas.microsoft.com/office/drawing/2014/main" id="{52BCF878-B1BD-C69B-CF2A-FAB76D4E27FE}"/>
+                <a16:creationId xmlns:a16="http://schemas.microsoft.com/office/drawing/2014/main" id="{F79E7FF9-1482-1872-3426-FA4591DF7960}"/>
               </a:ext>
             </a:extLst>
           </p:cNvPr>
@@ -617,7 +617,7 @@
           <p:cNvPr id="3" name="縦書きテキスト プレースホルダー 2">
             <a:extLst>
               <a:ext uri="{FF2B5EF4-FFF2-40B4-BE49-F238E27FC236}">
-                <a16:creationId xmlns:a16="http://schemas.microsoft.com/office/drawing/2014/main" id="{4FF42C15-8CA9-E6E9-4C24-164977B5CC76}"/>
+                <a16:creationId xmlns:a16="http://schemas.microsoft.com/office/drawing/2014/main" id="{53AFA950-366E-3DC1-8B07-3D101C34C826}"/>
               </a:ext>
             </a:extLst>
           </p:cNvPr>
@@ -711,7 +711,7 @@
           <p:cNvPr id="4" name="日付プレースホルダー 3">
             <a:extLst>
               <a:ext uri="{FF2B5EF4-FFF2-40B4-BE49-F238E27FC236}">
-                <a16:creationId xmlns:a16="http://schemas.microsoft.com/office/drawing/2014/main" id="{2F4C1FA9-12C9-7950-68D2-301CDB1740B5}"/>
+                <a16:creationId xmlns:a16="http://schemas.microsoft.com/office/drawing/2014/main" id="{C2A25D66-2054-D1C3-541C-9B6FDF81B1C6}"/>
               </a:ext>
             </a:extLst>
           </p:cNvPr>
@@ -727,7 +727,7 @@
           <a:bodyPr/>
           <a:lstStyle/>
           <a:p>
-            <a:fld id="{57300885-F7E3-44C8-81FD-6EEE2CA91821}" type="datetimeFigureOut">
+            <a:fld id="{FE270A2D-177A-41EB-8689-FF0085125FA0}" type="datetimeFigureOut">
               <a:rPr kumimoji="1" lang="ja-JP" altLang="en-US" smtClean="0"/>
               <a:t>2026/7/30</a:t>
             </a:fld>
@@ -740,7 +740,7 @@
           <p:cNvPr id="5" name="フッター プレースホルダー 4">
             <a:extLst>
               <a:ext uri="{FF2B5EF4-FFF2-40B4-BE49-F238E27FC236}">
-                <a16:creationId xmlns:a16="http://schemas.microsoft.com/office/drawing/2014/main" id="{E1C76517-778C-6443-F95D-07A9C6F46613}"/>
+                <a16:creationId xmlns:a16="http://schemas.microsoft.com/office/drawing/2014/main" id="{948D6CDD-A000-B5EB-62F0-BFBF5DF136DF}"/>
               </a:ext>
             </a:extLst>
           </p:cNvPr>
@@ -765,7 +765,7 @@
           <p:cNvPr id="6" name="スライド番号プレースホルダー 5">
             <a:extLst>
               <a:ext uri="{FF2B5EF4-FFF2-40B4-BE49-F238E27FC236}">
-                <a16:creationId xmlns:a16="http://schemas.microsoft.com/office/drawing/2014/main" id="{C47B3329-9EB3-B041-CE9D-7C6DFD9C2B99}"/>
+                <a16:creationId xmlns:a16="http://schemas.microsoft.com/office/drawing/2014/main" id="{D12281C4-DD01-89D9-235E-95FD751E909E}"/>
               </a:ext>
             </a:extLst>
           </p:cNvPr>
@@ -781,7 +781,7 @@
           <a:bodyPr/>
           <a:lstStyle/>
           <a:p>
-            <a:fld id="{CA3C3399-F037-41EE-9269-792D2EBAF5B2}" type="slidenum">
+            <a:fld id="{5F55CA0D-5453-4F13-A461-CCCDD36BBF48}" type="slidenum">
               <a:rPr kumimoji="1" lang="ja-JP" altLang="en-US" smtClean="0"/>
               <a:t>‹#›</a:t>
             </a:fld>
@@ -792,7 +792,7 @@
     </p:spTree>
     <p:extLst>
       <p:ext uri="{BB962C8B-B14F-4D97-AF65-F5344CB8AC3E}">
-        <p14:creationId xmlns:p14="http://schemas.microsoft.com/office/powerpoint/2010/main" val="911720471"/>
+        <p14:creationId xmlns:p14="http://schemas.microsoft.com/office/powerpoint/2010/main" val="2788448319"/>
       </p:ext>
     </p:extLst>
   </p:cSld>
@@ -824,7 +824,7 @@
           <p:cNvPr id="2" name="タイトル 1">
             <a:extLst>
               <a:ext uri="{FF2B5EF4-FFF2-40B4-BE49-F238E27FC236}">
-                <a16:creationId xmlns:a16="http://schemas.microsoft.com/office/drawing/2014/main" id="{0570E261-DEA3-A4F7-7B91-7B0C170E9D32}"/>
+                <a16:creationId xmlns:a16="http://schemas.microsoft.com/office/drawing/2014/main" id="{09264B0F-05AC-1C19-4BA6-204524056DEE}"/>
               </a:ext>
             </a:extLst>
           </p:cNvPr>
@@ -852,7 +852,7 @@
           <p:cNvPr id="3" name="コンテンツ プレースホルダー 2">
             <a:extLst>
               <a:ext uri="{FF2B5EF4-FFF2-40B4-BE49-F238E27FC236}">
-                <a16:creationId xmlns:a16="http://schemas.microsoft.com/office/drawing/2014/main" id="{554474B8-8D9F-D314-09DA-B50BCF94B1DF}"/>
+                <a16:creationId xmlns:a16="http://schemas.microsoft.com/office/drawing/2014/main" id="{12D9F478-08C6-334C-8F01-7D8ED6B807E9}"/>
               </a:ext>
             </a:extLst>
           </p:cNvPr>
@@ -941,7 +941,7 @@
           <p:cNvPr id="4" name="日付プレースホルダー 3">
             <a:extLst>
               <a:ext uri="{FF2B5EF4-FFF2-40B4-BE49-F238E27FC236}">
-                <a16:creationId xmlns:a16="http://schemas.microsoft.com/office/drawing/2014/main" id="{8998908C-4BDE-DF3D-2DC0-1D8466566BA3}"/>
+                <a16:creationId xmlns:a16="http://schemas.microsoft.com/office/drawing/2014/main" id="{B91C2CAF-1A74-A4B0-1364-2BE34515389E}"/>
               </a:ext>
             </a:extLst>
           </p:cNvPr>
@@ -957,7 +957,7 @@
           <a:bodyPr/>
           <a:lstStyle/>
           <a:p>
-            <a:fld id="{57300885-F7E3-44C8-81FD-6EEE2CA91821}" type="datetimeFigureOut">
+            <a:fld id="{FE270A2D-177A-41EB-8689-FF0085125FA0}" type="datetimeFigureOut">
               <a:rPr kumimoji="1" lang="ja-JP" altLang="en-US" smtClean="0"/>
               <a:t>2026/7/30</a:t>
             </a:fld>
@@ -970,7 +970,7 @@
           <p:cNvPr id="5" name="フッター プレースホルダー 4">
             <a:extLst>
               <a:ext uri="{FF2B5EF4-FFF2-40B4-BE49-F238E27FC236}">
-                <a16:creationId xmlns:a16="http://schemas.microsoft.com/office/drawing/2014/main" id="{12B439E0-CDD4-93E8-4215-EF6F9AA94E79}"/>
+                <a16:creationId xmlns:a16="http://schemas.microsoft.com/office/drawing/2014/main" id="{47D86AFB-703B-18B6-13FB-5E5BCA0A3230}"/>
               </a:ext>
             </a:extLst>
           </p:cNvPr>
@@ -995,7 +995,7 @@
           <p:cNvPr id="6" name="スライド番号プレースホルダー 5">
             <a:extLst>
               <a:ext uri="{FF2B5EF4-FFF2-40B4-BE49-F238E27FC236}">
-                <a16:creationId xmlns:a16="http://schemas.microsoft.com/office/drawing/2014/main" id="{DEE6BCD1-1B89-888B-DBC5-E540AC3798A9}"/>
+                <a16:creationId xmlns:a16="http://schemas.microsoft.com/office/drawing/2014/main" id="{85ED916B-2738-1BEE-FAF5-6BFA25C274DD}"/>
               </a:ext>
             </a:extLst>
           </p:cNvPr>
@@ -1011,7 +1011,7 @@
           <a:bodyPr/>
           <a:lstStyle/>
           <a:p>
-            <a:fld id="{CA3C3399-F037-41EE-9269-792D2EBAF5B2}" type="slidenum">
+            <a:fld id="{5F55CA0D-5453-4F13-A461-CCCDD36BBF48}" type="slidenum">
               <a:rPr kumimoji="1" lang="ja-JP" altLang="en-US" smtClean="0"/>
               <a:t>‹#›</a:t>
             </a:fld>
@@ -1022,7 +1022,7 @@
     </p:spTree>
     <p:extLst>
       <p:ext uri="{BB962C8B-B14F-4D97-AF65-F5344CB8AC3E}">
-        <p14:creationId xmlns:p14="http://schemas.microsoft.com/office/powerpoint/2010/main" val="2465482372"/>
+        <p14:creationId xmlns:p14="http://schemas.microsoft.com/office/powerpoint/2010/main" val="2005868401"/>
       </p:ext>
     </p:extLst>
   </p:cSld>
@@ -1054,7 +1054,7 @@
           <p:cNvPr id="2" name="タイトル 1">
             <a:extLst>
               <a:ext uri="{FF2B5EF4-FFF2-40B4-BE49-F238E27FC236}">
-                <a16:creationId xmlns:a16="http://schemas.microsoft.com/office/drawing/2014/main" id="{95F4550D-A0FF-8BE3-592A-75059E479D21}"/>
+                <a16:creationId xmlns:a16="http://schemas.microsoft.com/office/drawing/2014/main" id="{F34022D6-EF74-F215-8199-55DA0B2B7584}"/>
               </a:ext>
             </a:extLst>
           </p:cNvPr>
@@ -1091,7 +1091,7 @@
           <p:cNvPr id="3" name="テキスト プレースホルダー 2">
             <a:extLst>
               <a:ext uri="{FF2B5EF4-FFF2-40B4-BE49-F238E27FC236}">
-                <a16:creationId xmlns:a16="http://schemas.microsoft.com/office/drawing/2014/main" id="{E257CB55-1116-9F13-8E58-C0F1EF0FF5B3}"/>
+                <a16:creationId xmlns:a16="http://schemas.microsoft.com/office/drawing/2014/main" id="{FA14D713-7B9C-2066-9625-CB607BE92ED4}"/>
               </a:ext>
             </a:extLst>
           </p:cNvPr>
@@ -1216,7 +1216,7 @@
           <p:cNvPr id="4" name="日付プレースホルダー 3">
             <a:extLst>
               <a:ext uri="{FF2B5EF4-FFF2-40B4-BE49-F238E27FC236}">
-                <a16:creationId xmlns:a16="http://schemas.microsoft.com/office/drawing/2014/main" id="{E14FDA4C-B253-1AA5-A7FC-10457151A22A}"/>
+                <a16:creationId xmlns:a16="http://schemas.microsoft.com/office/drawing/2014/main" id="{82FDC1A3-7DEA-9012-648A-B8F0BFDD2764}"/>
               </a:ext>
             </a:extLst>
           </p:cNvPr>
@@ -1232,7 +1232,7 @@
           <a:bodyPr/>
           <a:lstStyle/>
           <a:p>
-            <a:fld id="{57300885-F7E3-44C8-81FD-6EEE2CA91821}" type="datetimeFigureOut">
+            <a:fld id="{FE270A2D-177A-41EB-8689-FF0085125FA0}" type="datetimeFigureOut">
               <a:rPr kumimoji="1" lang="ja-JP" altLang="en-US" smtClean="0"/>
               <a:t>2026/7/30</a:t>
             </a:fld>
@@ -1245,7 +1245,7 @@
           <p:cNvPr id="5" name="フッター プレースホルダー 4">
             <a:extLst>
               <a:ext uri="{FF2B5EF4-FFF2-40B4-BE49-F238E27FC236}">
-                <a16:creationId xmlns:a16="http://schemas.microsoft.com/office/drawing/2014/main" id="{0D3A452B-B80E-1DFF-4DCB-786B0CA059F1}"/>
+                <a16:creationId xmlns:a16="http://schemas.microsoft.com/office/drawing/2014/main" id="{55C0383C-99C0-284F-4BC3-FE7B08E41DF3}"/>
               </a:ext>
             </a:extLst>
           </p:cNvPr>
@@ -1270,7 +1270,7 @@
           <p:cNvPr id="6" name="スライド番号プレースホルダー 5">
             <a:extLst>
               <a:ext uri="{FF2B5EF4-FFF2-40B4-BE49-F238E27FC236}">
-                <a16:creationId xmlns:a16="http://schemas.microsoft.com/office/drawing/2014/main" id="{17B9D120-25C8-E7C0-7458-26E2966EAA59}"/>
+                <a16:creationId xmlns:a16="http://schemas.microsoft.com/office/drawing/2014/main" id="{59B0067F-7659-BF7A-9662-F4CB1A0A561F}"/>
               </a:ext>
             </a:extLst>
           </p:cNvPr>
@@ -1286,7 +1286,7 @@
           <a:bodyPr/>
           <a:lstStyle/>
           <a:p>
-            <a:fld id="{CA3C3399-F037-41EE-9269-792D2EBAF5B2}" type="slidenum">
+            <a:fld id="{5F55CA0D-5453-4F13-A461-CCCDD36BBF48}" type="slidenum">
               <a:rPr kumimoji="1" lang="ja-JP" altLang="en-US" smtClean="0"/>
               <a:t>‹#›</a:t>
             </a:fld>
@@ -1297,7 +1297,7 @@
     </p:spTree>
     <p:extLst>
       <p:ext uri="{BB962C8B-B14F-4D97-AF65-F5344CB8AC3E}">
-        <p14:creationId xmlns:p14="http://schemas.microsoft.com/office/powerpoint/2010/main" val="2245646677"/>
+        <p14:creationId xmlns:p14="http://schemas.microsoft.com/office/powerpoint/2010/main" val="3701267173"/>
       </p:ext>
     </p:extLst>
   </p:cSld>
@@ -1329,7 +1329,7 @@
           <p:cNvPr id="2" name="タイトル 1">
             <a:extLst>
               <a:ext uri="{FF2B5EF4-FFF2-40B4-BE49-F238E27FC236}">
-                <a16:creationId xmlns:a16="http://schemas.microsoft.com/office/drawing/2014/main" id="{86E320D4-2F03-966C-0641-743CE1ED4651}"/>
+                <a16:creationId xmlns:a16="http://schemas.microsoft.com/office/drawing/2014/main" id="{CDBFDAAB-CFC4-33BF-D312-D1BDA92DF6A6}"/>
               </a:ext>
             </a:extLst>
           </p:cNvPr>
@@ -1357,7 +1357,7 @@
           <p:cNvPr id="3" name="コンテンツ プレースホルダー 2">
             <a:extLst>
               <a:ext uri="{FF2B5EF4-FFF2-40B4-BE49-F238E27FC236}">
-                <a16:creationId xmlns:a16="http://schemas.microsoft.com/office/drawing/2014/main" id="{66C2E773-E50F-3AB3-0F93-50BE077C5C0D}"/>
+                <a16:creationId xmlns:a16="http://schemas.microsoft.com/office/drawing/2014/main" id="{09783C0F-7091-9A76-244A-DDFD34CF2863}"/>
               </a:ext>
             </a:extLst>
           </p:cNvPr>
@@ -1451,7 +1451,7 @@
           <p:cNvPr id="4" name="コンテンツ プレースホルダー 3">
             <a:extLst>
               <a:ext uri="{FF2B5EF4-FFF2-40B4-BE49-F238E27FC236}">
-                <a16:creationId xmlns:a16="http://schemas.microsoft.com/office/drawing/2014/main" id="{55AC6AB4-7A31-9306-0213-98F99E8E9CEF}"/>
+                <a16:creationId xmlns:a16="http://schemas.microsoft.com/office/drawing/2014/main" id="{C2E41AF6-A8AD-0C35-D2D8-87B33BC6573C}"/>
               </a:ext>
             </a:extLst>
           </p:cNvPr>
@@ -1545,7 +1545,7 @@
           <p:cNvPr id="5" name="日付プレースホルダー 4">
             <a:extLst>
               <a:ext uri="{FF2B5EF4-FFF2-40B4-BE49-F238E27FC236}">
-                <a16:creationId xmlns:a16="http://schemas.microsoft.com/office/drawing/2014/main" id="{DDFE2DC3-FCF5-26D1-B6FA-38DB620A044F}"/>
+                <a16:creationId xmlns:a16="http://schemas.microsoft.com/office/drawing/2014/main" id="{5CFEDB43-1347-8F4A-CFD4-3134CDD049D4}"/>
               </a:ext>
             </a:extLst>
           </p:cNvPr>
@@ -1561,7 +1561,7 @@
           <a:bodyPr/>
           <a:lstStyle/>
           <a:p>
-            <a:fld id="{57300885-F7E3-44C8-81FD-6EEE2CA91821}" type="datetimeFigureOut">
+            <a:fld id="{FE270A2D-177A-41EB-8689-FF0085125FA0}" type="datetimeFigureOut">
               <a:rPr kumimoji="1" lang="ja-JP" altLang="en-US" smtClean="0"/>
               <a:t>2026/7/30</a:t>
             </a:fld>
@@ -1574,7 +1574,7 @@
           <p:cNvPr id="6" name="フッター プレースホルダー 5">
             <a:extLst>
               <a:ext uri="{FF2B5EF4-FFF2-40B4-BE49-F238E27FC236}">
-                <a16:creationId xmlns:a16="http://schemas.microsoft.com/office/drawing/2014/main" id="{0D767A0A-D387-0AE3-36CF-A1B24504202D}"/>
+                <a16:creationId xmlns:a16="http://schemas.microsoft.com/office/drawing/2014/main" id="{BA59D60D-4AE6-BA70-28BF-0F700E1277DF}"/>
               </a:ext>
             </a:extLst>
           </p:cNvPr>
@@ -1599,7 +1599,7 @@
           <p:cNvPr id="7" name="スライド番号プレースホルダー 6">
             <a:extLst>
               <a:ext uri="{FF2B5EF4-FFF2-40B4-BE49-F238E27FC236}">
-                <a16:creationId xmlns:a16="http://schemas.microsoft.com/office/drawing/2014/main" id="{E41A33FE-7129-AAF4-E2BF-D8B8856D3DB9}"/>
+                <a16:creationId xmlns:a16="http://schemas.microsoft.com/office/drawing/2014/main" id="{8C9C4B33-3531-400F-9343-36B611776A19}"/>
               </a:ext>
             </a:extLst>
           </p:cNvPr>
@@ -1615,7 +1615,7 @@
           <a:bodyPr/>
           <a:lstStyle/>
           <a:p>
-            <a:fld id="{CA3C3399-F037-41EE-9269-792D2EBAF5B2}" type="slidenum">
+            <a:fld id="{5F55CA0D-5453-4F13-A461-CCCDD36BBF48}" type="slidenum">
               <a:rPr kumimoji="1" lang="ja-JP" altLang="en-US" smtClean="0"/>
               <a:t>‹#›</a:t>
             </a:fld>
@@ -1626,7 +1626,7 @@
     </p:spTree>
     <p:extLst>
       <p:ext uri="{BB962C8B-B14F-4D97-AF65-F5344CB8AC3E}">
-        <p14:creationId xmlns:p14="http://schemas.microsoft.com/office/powerpoint/2010/main" val="1855713471"/>
+        <p14:creationId xmlns:p14="http://schemas.microsoft.com/office/powerpoint/2010/main" val="1428731940"/>
       </p:ext>
     </p:extLst>
   </p:cSld>
@@ -1658,7 +1658,7 @@
           <p:cNvPr id="2" name="タイトル 1">
             <a:extLst>
               <a:ext uri="{FF2B5EF4-FFF2-40B4-BE49-F238E27FC236}">
-                <a16:creationId xmlns:a16="http://schemas.microsoft.com/office/drawing/2014/main" id="{BBB1A4C9-4EF1-0FD4-EF05-306CDCF9A427}"/>
+                <a16:creationId xmlns:a16="http://schemas.microsoft.com/office/drawing/2014/main" id="{DBC9384E-1AA2-4D18-5D4E-E1BA785F753A}"/>
               </a:ext>
             </a:extLst>
           </p:cNvPr>
@@ -1691,7 +1691,7 @@
           <p:cNvPr id="3" name="テキスト プレースホルダー 2">
             <a:extLst>
               <a:ext uri="{FF2B5EF4-FFF2-40B4-BE49-F238E27FC236}">
-                <a16:creationId xmlns:a16="http://schemas.microsoft.com/office/drawing/2014/main" id="{551C8C39-2854-5030-DA04-D6D1F050E1C6}"/>
+                <a16:creationId xmlns:a16="http://schemas.microsoft.com/office/drawing/2014/main" id="{4062A292-CD50-F3AE-0650-7CB95BBA592F}"/>
               </a:ext>
             </a:extLst>
           </p:cNvPr>
@@ -1762,7 +1762,7 @@
           <p:cNvPr id="4" name="コンテンツ プレースホルダー 3">
             <a:extLst>
               <a:ext uri="{FF2B5EF4-FFF2-40B4-BE49-F238E27FC236}">
-                <a16:creationId xmlns:a16="http://schemas.microsoft.com/office/drawing/2014/main" id="{C02B2A1E-0ACF-2282-E4B7-ABEE1B364DEB}"/>
+                <a16:creationId xmlns:a16="http://schemas.microsoft.com/office/drawing/2014/main" id="{DBBEAF84-935A-3F5B-09A6-2896307E9EB5}"/>
               </a:ext>
             </a:extLst>
           </p:cNvPr>
@@ -1856,7 +1856,7 @@
           <p:cNvPr id="5" name="テキスト プレースホルダー 4">
             <a:extLst>
               <a:ext uri="{FF2B5EF4-FFF2-40B4-BE49-F238E27FC236}">
-                <a16:creationId xmlns:a16="http://schemas.microsoft.com/office/drawing/2014/main" id="{226DC01F-3126-D18E-ABEA-2C6574BECB9E}"/>
+                <a16:creationId xmlns:a16="http://schemas.microsoft.com/office/drawing/2014/main" id="{D5037070-1458-97BF-4389-2A2D718889D2}"/>
               </a:ext>
             </a:extLst>
           </p:cNvPr>
@@ -1927,7 +1927,7 @@
           <p:cNvPr id="6" name="コンテンツ プレースホルダー 5">
             <a:extLst>
               <a:ext uri="{FF2B5EF4-FFF2-40B4-BE49-F238E27FC236}">
-                <a16:creationId xmlns:a16="http://schemas.microsoft.com/office/drawing/2014/main" id="{89B460E4-3624-B16B-3C95-478EA82C8152}"/>
+                <a16:creationId xmlns:a16="http://schemas.microsoft.com/office/drawing/2014/main" id="{67C258B2-1590-1DBD-8176-E9D5ED90F83A}"/>
               </a:ext>
             </a:extLst>
           </p:cNvPr>
@@ -2021,7 +2021,7 @@
           <p:cNvPr id="7" name="日付プレースホルダー 6">
             <a:extLst>
               <a:ext uri="{FF2B5EF4-FFF2-40B4-BE49-F238E27FC236}">
-                <a16:creationId xmlns:a16="http://schemas.microsoft.com/office/drawing/2014/main" id="{4AEAAD74-E2D6-50C7-7FB9-B061B5D917B4}"/>
+                <a16:creationId xmlns:a16="http://schemas.microsoft.com/office/drawing/2014/main" id="{6805C2FC-D269-14E0-46B9-F41FD8D26B51}"/>
               </a:ext>
             </a:extLst>
           </p:cNvPr>
@@ -2037,7 +2037,7 @@
           <a:bodyPr/>
           <a:lstStyle/>
           <a:p>
-            <a:fld id="{57300885-F7E3-44C8-81FD-6EEE2CA91821}" type="datetimeFigureOut">
+            <a:fld id="{FE270A2D-177A-41EB-8689-FF0085125FA0}" type="datetimeFigureOut">
               <a:rPr kumimoji="1" lang="ja-JP" altLang="en-US" smtClean="0"/>
               <a:t>2026/7/30</a:t>
             </a:fld>
@@ -2050,7 +2050,7 @@
           <p:cNvPr id="8" name="フッター プレースホルダー 7">
             <a:extLst>
               <a:ext uri="{FF2B5EF4-FFF2-40B4-BE49-F238E27FC236}">
-                <a16:creationId xmlns:a16="http://schemas.microsoft.com/office/drawing/2014/main" id="{11DF7ADB-C947-E4AB-CA60-97E3214E205F}"/>
+                <a16:creationId xmlns:a16="http://schemas.microsoft.com/office/drawing/2014/main" id="{1B08E42E-8159-8DF8-2955-F9CDA7BED22E}"/>
               </a:ext>
             </a:extLst>
           </p:cNvPr>
@@ -2075,7 +2075,7 @@
           <p:cNvPr id="9" name="スライド番号プレースホルダー 8">
             <a:extLst>
               <a:ext uri="{FF2B5EF4-FFF2-40B4-BE49-F238E27FC236}">
-                <a16:creationId xmlns:a16="http://schemas.microsoft.com/office/drawing/2014/main" id="{CCD2CF26-0434-2931-B9B1-80DC9D13F714}"/>
+                <a16:creationId xmlns:a16="http://schemas.microsoft.com/office/drawing/2014/main" id="{0F1B5C00-FB54-29BC-168B-8A530CCDA728}"/>
               </a:ext>
             </a:extLst>
           </p:cNvPr>
@@ -2091,7 +2091,7 @@
           <a:bodyPr/>
           <a:lstStyle/>
           <a:p>
-            <a:fld id="{CA3C3399-F037-41EE-9269-792D2EBAF5B2}" type="slidenum">
+            <a:fld id="{5F55CA0D-5453-4F13-A461-CCCDD36BBF48}" type="slidenum">
               <a:rPr kumimoji="1" lang="ja-JP" altLang="en-US" smtClean="0"/>
               <a:t>‹#›</a:t>
             </a:fld>
@@ -2102,7 +2102,7 @@
     </p:spTree>
     <p:extLst>
       <p:ext uri="{BB962C8B-B14F-4D97-AF65-F5344CB8AC3E}">
-        <p14:creationId xmlns:p14="http://schemas.microsoft.com/office/powerpoint/2010/main" val="3586929757"/>
+        <p14:creationId xmlns:p14="http://schemas.microsoft.com/office/powerpoint/2010/main" val="78233414"/>
       </p:ext>
     </p:extLst>
   </p:cSld>
@@ -2134,7 +2134,7 @@
           <p:cNvPr id="2" name="タイトル 1">
             <a:extLst>
               <a:ext uri="{FF2B5EF4-FFF2-40B4-BE49-F238E27FC236}">
-                <a16:creationId xmlns:a16="http://schemas.microsoft.com/office/drawing/2014/main" id="{F648D295-047C-9907-EF5F-22FA89659011}"/>
+                <a16:creationId xmlns:a16="http://schemas.microsoft.com/office/drawing/2014/main" id="{AC339FB2-F799-5C32-AFE8-9785E85FB880}"/>
               </a:ext>
             </a:extLst>
           </p:cNvPr>
@@ -2162,7 +2162,7 @@
           <p:cNvPr id="3" name="日付プレースホルダー 2">
             <a:extLst>
               <a:ext uri="{FF2B5EF4-FFF2-40B4-BE49-F238E27FC236}">
-                <a16:creationId xmlns:a16="http://schemas.microsoft.com/office/drawing/2014/main" id="{46E2249C-1839-05EE-C382-ECB745F26E85}"/>
+                <a16:creationId xmlns:a16="http://schemas.microsoft.com/office/drawing/2014/main" id="{D8133F0F-49E6-D327-1DED-6307B43913E9}"/>
               </a:ext>
             </a:extLst>
           </p:cNvPr>
@@ -2178,7 +2178,7 @@
           <a:bodyPr/>
           <a:lstStyle/>
           <a:p>
-            <a:fld id="{57300885-F7E3-44C8-81FD-6EEE2CA91821}" type="datetimeFigureOut">
+            <a:fld id="{FE270A2D-177A-41EB-8689-FF0085125FA0}" type="datetimeFigureOut">
               <a:rPr kumimoji="1" lang="ja-JP" altLang="en-US" smtClean="0"/>
               <a:t>2026/7/30</a:t>
             </a:fld>
@@ -2191,7 +2191,7 @@
           <p:cNvPr id="4" name="フッター プレースホルダー 3">
             <a:extLst>
               <a:ext uri="{FF2B5EF4-FFF2-40B4-BE49-F238E27FC236}">
-                <a16:creationId xmlns:a16="http://schemas.microsoft.com/office/drawing/2014/main" id="{B2D85062-DF6C-2D8E-4425-253A30E16493}"/>
+                <a16:creationId xmlns:a16="http://schemas.microsoft.com/office/drawing/2014/main" id="{6889B832-D608-697C-4958-E97FDE298B17}"/>
               </a:ext>
             </a:extLst>
           </p:cNvPr>
@@ -2216,7 +2216,7 @@
           <p:cNvPr id="5" name="スライド番号プレースホルダー 4">
             <a:extLst>
               <a:ext uri="{FF2B5EF4-FFF2-40B4-BE49-F238E27FC236}">
-                <a16:creationId xmlns:a16="http://schemas.microsoft.com/office/drawing/2014/main" id="{670369A3-B920-B0E9-7943-BF1424194A4A}"/>
+                <a16:creationId xmlns:a16="http://schemas.microsoft.com/office/drawing/2014/main" id="{5AE2B4B4-F992-210C-78AC-CE5706B790F5}"/>
               </a:ext>
             </a:extLst>
           </p:cNvPr>
@@ -2232,7 +2232,7 @@
           <a:bodyPr/>
           <a:lstStyle/>
           <a:p>
-            <a:fld id="{CA3C3399-F037-41EE-9269-792D2EBAF5B2}" type="slidenum">
+            <a:fld id="{5F55CA0D-5453-4F13-A461-CCCDD36BBF48}" type="slidenum">
               <a:rPr kumimoji="1" lang="ja-JP" altLang="en-US" smtClean="0"/>
               <a:t>‹#›</a:t>
             </a:fld>
@@ -2243,7 +2243,7 @@
     </p:spTree>
     <p:extLst>
       <p:ext uri="{BB962C8B-B14F-4D97-AF65-F5344CB8AC3E}">
-        <p14:creationId xmlns:p14="http://schemas.microsoft.com/office/powerpoint/2010/main" val="2903376682"/>
+        <p14:creationId xmlns:p14="http://schemas.microsoft.com/office/powerpoint/2010/main" val="1385930308"/>
       </p:ext>
     </p:extLst>
   </p:cSld>
@@ -2275,7 +2275,7 @@
           <p:cNvPr id="2" name="日付プレースホルダー 1">
             <a:extLst>
               <a:ext uri="{FF2B5EF4-FFF2-40B4-BE49-F238E27FC236}">
-                <a16:creationId xmlns:a16="http://schemas.microsoft.com/office/drawing/2014/main" id="{97C4A334-8988-F426-E094-161B48EE754D}"/>
+                <a16:creationId xmlns:a16="http://schemas.microsoft.com/office/drawing/2014/main" id="{B0A658BD-72E4-2B39-A5F6-2168B7989A0F}"/>
               </a:ext>
             </a:extLst>
           </p:cNvPr>
@@ -2291,7 +2291,7 @@
           <a:bodyPr/>
           <a:lstStyle/>
           <a:p>
-            <a:fld id="{57300885-F7E3-44C8-81FD-6EEE2CA91821}" type="datetimeFigureOut">
+            <a:fld id="{FE270A2D-177A-41EB-8689-FF0085125FA0}" type="datetimeFigureOut">
               <a:rPr kumimoji="1" lang="ja-JP" altLang="en-US" smtClean="0"/>
               <a:t>2026/7/30</a:t>
             </a:fld>
@@ -2304,7 +2304,7 @@
           <p:cNvPr id="3" name="フッター プレースホルダー 2">
             <a:extLst>
               <a:ext uri="{FF2B5EF4-FFF2-40B4-BE49-F238E27FC236}">
-                <a16:creationId xmlns:a16="http://schemas.microsoft.com/office/drawing/2014/main" id="{401952DC-E6E9-824C-1BBE-A8905C7E7866}"/>
+                <a16:creationId xmlns:a16="http://schemas.microsoft.com/office/drawing/2014/main" id="{F7CEE405-4320-121A-30E0-C443ACB720DB}"/>
               </a:ext>
             </a:extLst>
           </p:cNvPr>
@@ -2329,7 +2329,7 @@
           <p:cNvPr id="4" name="スライド番号プレースホルダー 3">
             <a:extLst>
               <a:ext uri="{FF2B5EF4-FFF2-40B4-BE49-F238E27FC236}">
-                <a16:creationId xmlns:a16="http://schemas.microsoft.com/office/drawing/2014/main" id="{884F6CB9-9246-60B4-B147-70E1272031B1}"/>
+                <a16:creationId xmlns:a16="http://schemas.microsoft.com/office/drawing/2014/main" id="{AF79EAE9-847B-CB97-677E-DA132C011300}"/>
               </a:ext>
             </a:extLst>
           </p:cNvPr>
@@ -2345,7 +2345,7 @@
           <a:bodyPr/>
           <a:lstStyle/>
           <a:p>
-            <a:fld id="{CA3C3399-F037-41EE-9269-792D2EBAF5B2}" type="slidenum">
+            <a:fld id="{5F55CA0D-5453-4F13-A461-CCCDD36BBF48}" type="slidenum">
               <a:rPr kumimoji="1" lang="ja-JP" altLang="en-US" smtClean="0"/>
               <a:t>‹#›</a:t>
             </a:fld>
@@ -2356,7 +2356,7 @@
     </p:spTree>
     <p:extLst>
       <p:ext uri="{BB962C8B-B14F-4D97-AF65-F5344CB8AC3E}">
-        <p14:creationId xmlns:p14="http://schemas.microsoft.com/office/powerpoint/2010/main" val="863473452"/>
+        <p14:creationId xmlns:p14="http://schemas.microsoft.com/office/powerpoint/2010/main" val="2496563036"/>
       </p:ext>
     </p:extLst>
   </p:cSld>
@@ -2388,7 +2388,7 @@
           <p:cNvPr id="2" name="タイトル 1">
             <a:extLst>
               <a:ext uri="{FF2B5EF4-FFF2-40B4-BE49-F238E27FC236}">
-                <a16:creationId xmlns:a16="http://schemas.microsoft.com/office/drawing/2014/main" id="{BC8DD4BA-408D-F2FB-486F-5829AE6D8010}"/>
+                <a16:creationId xmlns:a16="http://schemas.microsoft.com/office/drawing/2014/main" id="{0F82CE93-B924-67FC-62D7-EC1BCF843072}"/>
               </a:ext>
             </a:extLst>
           </p:cNvPr>
@@ -2425,7 +2425,7 @@
           <p:cNvPr id="3" name="コンテンツ プレースホルダー 2">
             <a:extLst>
               <a:ext uri="{FF2B5EF4-FFF2-40B4-BE49-F238E27FC236}">
-                <a16:creationId xmlns:a16="http://schemas.microsoft.com/office/drawing/2014/main" id="{0B13F807-2D46-0CC3-F4D2-4FB9AC2B8A04}"/>
+                <a16:creationId xmlns:a16="http://schemas.microsoft.com/office/drawing/2014/main" id="{F035B7DD-29BB-8410-7794-31514D2D7C42}"/>
               </a:ext>
             </a:extLst>
           </p:cNvPr>
@@ -2547,7 +2547,7 @@
           <p:cNvPr id="4" name="テキスト プレースホルダー 3">
             <a:extLst>
               <a:ext uri="{FF2B5EF4-FFF2-40B4-BE49-F238E27FC236}">
-                <a16:creationId xmlns:a16="http://schemas.microsoft.com/office/drawing/2014/main" id="{8318FC1B-2D18-F192-2968-73860BF428C0}"/>
+                <a16:creationId xmlns:a16="http://schemas.microsoft.com/office/drawing/2014/main" id="{E05E0D23-C6E3-78AA-41D5-C5110210B214}"/>
               </a:ext>
             </a:extLst>
           </p:cNvPr>
@@ -2618,7 +2618,7 @@
           <p:cNvPr id="5" name="日付プレースホルダー 4">
             <a:extLst>
               <a:ext uri="{FF2B5EF4-FFF2-40B4-BE49-F238E27FC236}">
-                <a16:creationId xmlns:a16="http://schemas.microsoft.com/office/drawing/2014/main" id="{7A02B583-D257-345F-7FE6-02EA30B77A27}"/>
+                <a16:creationId xmlns:a16="http://schemas.microsoft.com/office/drawing/2014/main" id="{5A333E98-95D5-3E42-8A8C-79AE566BE8E0}"/>
               </a:ext>
             </a:extLst>
           </p:cNvPr>
@@ -2634,7 +2634,7 @@
           <a:bodyPr/>
           <a:lstStyle/>
           <a:p>
-            <a:fld id="{57300885-F7E3-44C8-81FD-6EEE2CA91821}" type="datetimeFigureOut">
+            <a:fld id="{FE270A2D-177A-41EB-8689-FF0085125FA0}" type="datetimeFigureOut">
               <a:rPr kumimoji="1" lang="ja-JP" altLang="en-US" smtClean="0"/>
               <a:t>2026/7/30</a:t>
             </a:fld>
@@ -2647,7 +2647,7 @@
           <p:cNvPr id="6" name="フッター プレースホルダー 5">
             <a:extLst>
               <a:ext uri="{FF2B5EF4-FFF2-40B4-BE49-F238E27FC236}">
-                <a16:creationId xmlns:a16="http://schemas.microsoft.com/office/drawing/2014/main" id="{CD9BE0C3-CF2D-918E-9EBE-B6F2AF73BF79}"/>
+                <a16:creationId xmlns:a16="http://schemas.microsoft.com/office/drawing/2014/main" id="{4BE1F267-1B92-CE32-BC50-7697219A9CE0}"/>
               </a:ext>
             </a:extLst>
           </p:cNvPr>
@@ -2672,7 +2672,7 @@
           <p:cNvPr id="7" name="スライド番号プレースホルダー 6">
             <a:extLst>
               <a:ext uri="{FF2B5EF4-FFF2-40B4-BE49-F238E27FC236}">
-                <a16:creationId xmlns:a16="http://schemas.microsoft.com/office/drawing/2014/main" id="{24914A0D-2FA8-E2CF-05CC-0D29C2E1FD76}"/>
+                <a16:creationId xmlns:a16="http://schemas.microsoft.com/office/drawing/2014/main" id="{DB6ED440-44A6-7CFD-3C47-157F5BE97862}"/>
               </a:ext>
             </a:extLst>
           </p:cNvPr>
@@ -2688,7 +2688,7 @@
           <a:bodyPr/>
           <a:lstStyle/>
           <a:p>
-            <a:fld id="{CA3C3399-F037-41EE-9269-792D2EBAF5B2}" type="slidenum">
+            <a:fld id="{5F55CA0D-5453-4F13-A461-CCCDD36BBF48}" type="slidenum">
               <a:rPr kumimoji="1" lang="ja-JP" altLang="en-US" smtClean="0"/>
               <a:t>‹#›</a:t>
             </a:fld>
@@ -2699,7 +2699,7 @@
     </p:spTree>
     <p:extLst>
       <p:ext uri="{BB962C8B-B14F-4D97-AF65-F5344CB8AC3E}">
-        <p14:creationId xmlns:p14="http://schemas.microsoft.com/office/powerpoint/2010/main" val="989075778"/>
+        <p14:creationId xmlns:p14="http://schemas.microsoft.com/office/powerpoint/2010/main" val="3680745100"/>
       </p:ext>
     </p:extLst>
   </p:cSld>
@@ -2731,7 +2731,7 @@
           <p:cNvPr id="2" name="タイトル 1">
             <a:extLst>
               <a:ext uri="{FF2B5EF4-FFF2-40B4-BE49-F238E27FC236}">
-                <a16:creationId xmlns:a16="http://schemas.microsoft.com/office/drawing/2014/main" id="{4DA348F9-0D58-EB71-281E-BFB1E9A6DBEA}"/>
+                <a16:creationId xmlns:a16="http://schemas.microsoft.com/office/drawing/2014/main" id="{7C1B76F9-CC49-BA59-1BF8-037F40426497}"/>
               </a:ext>
             </a:extLst>
           </p:cNvPr>
@@ -2768,7 +2768,7 @@
           <p:cNvPr id="3" name="図プレースホルダー 2">
             <a:extLst>
               <a:ext uri="{FF2B5EF4-FFF2-40B4-BE49-F238E27FC236}">
-                <a16:creationId xmlns:a16="http://schemas.microsoft.com/office/drawing/2014/main" id="{85D3F966-8D41-F4B3-9904-719D31472574}"/>
+                <a16:creationId xmlns:a16="http://schemas.microsoft.com/office/drawing/2014/main" id="{64A12250-5627-884F-0410-EDCF465B5697}"/>
               </a:ext>
             </a:extLst>
           </p:cNvPr>
@@ -2835,7 +2835,7 @@
           <p:cNvPr id="4" name="テキスト プレースホルダー 3">
             <a:extLst>
               <a:ext uri="{FF2B5EF4-FFF2-40B4-BE49-F238E27FC236}">
-                <a16:creationId xmlns:a16="http://schemas.microsoft.com/office/drawing/2014/main" id="{57557CB0-90CC-89F2-DF89-70D52CC0CF06}"/>
+                <a16:creationId xmlns:a16="http://schemas.microsoft.com/office/drawing/2014/main" id="{680441C8-86DD-571C-2DDD-390D7940D7DA}"/>
               </a:ext>
             </a:extLst>
           </p:cNvPr>
@@ -2906,7 +2906,7 @@
           <p:cNvPr id="5" name="日付プレースホルダー 4">
             <a:extLst>
               <a:ext uri="{FF2B5EF4-FFF2-40B4-BE49-F238E27FC236}">
-                <a16:creationId xmlns:a16="http://schemas.microsoft.com/office/drawing/2014/main" id="{4F985619-0DE0-486A-B567-AEB1DA1157BF}"/>
+                <a16:creationId xmlns:a16="http://schemas.microsoft.com/office/drawing/2014/main" id="{7632C4A9-CC61-757B-05DE-3DA57ECB059A}"/>
               </a:ext>
             </a:extLst>
           </p:cNvPr>
@@ -2922,7 +2922,7 @@
           <a:bodyPr/>
           <a:lstStyle/>
           <a:p>
-            <a:fld id="{57300885-F7E3-44C8-81FD-6EEE2CA91821}" type="datetimeFigureOut">
+            <a:fld id="{FE270A2D-177A-41EB-8689-FF0085125FA0}" type="datetimeFigureOut">
               <a:rPr kumimoji="1" lang="ja-JP" altLang="en-US" smtClean="0"/>
               <a:t>2026/7/30</a:t>
             </a:fld>
@@ -2935,7 +2935,7 @@
           <p:cNvPr id="6" name="フッター プレースホルダー 5">
             <a:extLst>
               <a:ext uri="{FF2B5EF4-FFF2-40B4-BE49-F238E27FC236}">
-                <a16:creationId xmlns:a16="http://schemas.microsoft.com/office/drawing/2014/main" id="{F54EBBE0-A75B-A1D3-B33C-AFD7CC21518A}"/>
+                <a16:creationId xmlns:a16="http://schemas.microsoft.com/office/drawing/2014/main" id="{3480E0EB-5050-4F57-FCAA-2A10AF78CEE8}"/>
               </a:ext>
             </a:extLst>
           </p:cNvPr>
@@ -2960,7 +2960,7 @@
           <p:cNvPr id="7" name="スライド番号プレースホルダー 6">
             <a:extLst>
               <a:ext uri="{FF2B5EF4-FFF2-40B4-BE49-F238E27FC236}">
-                <a16:creationId xmlns:a16="http://schemas.microsoft.com/office/drawing/2014/main" id="{64DBB51F-2F2F-4A03-7D9C-DA417BB346AA}"/>
+                <a16:creationId xmlns:a16="http://schemas.microsoft.com/office/drawing/2014/main" id="{5735399B-F11B-AB86-9060-82F2F89BABF4}"/>
               </a:ext>
             </a:extLst>
           </p:cNvPr>
@@ -2976,7 +2976,7 @@
           <a:bodyPr/>
           <a:lstStyle/>
           <a:p>
-            <a:fld id="{CA3C3399-F037-41EE-9269-792D2EBAF5B2}" type="slidenum">
+            <a:fld id="{5F55CA0D-5453-4F13-A461-CCCDD36BBF48}" type="slidenum">
               <a:rPr kumimoji="1" lang="ja-JP" altLang="en-US" smtClean="0"/>
               <a:t>‹#›</a:t>
             </a:fld>
@@ -2987,7 +2987,7 @@
     </p:spTree>
     <p:extLst>
       <p:ext uri="{BB962C8B-B14F-4D97-AF65-F5344CB8AC3E}">
-        <p14:creationId xmlns:p14="http://schemas.microsoft.com/office/powerpoint/2010/main" val="2973446041"/>
+        <p14:creationId xmlns:p14="http://schemas.microsoft.com/office/powerpoint/2010/main" val="1789361265"/>
       </p:ext>
     </p:extLst>
   </p:cSld>
@@ -3024,7 +3024,7 @@
           <p:cNvPr id="2" name="タイトル プレースホルダー 1">
             <a:extLst>
               <a:ext uri="{FF2B5EF4-FFF2-40B4-BE49-F238E27FC236}">
-                <a16:creationId xmlns:a16="http://schemas.microsoft.com/office/drawing/2014/main" id="{D562F485-EC6D-913D-7FEB-C105E25C7CD9}"/>
+                <a16:creationId xmlns:a16="http://schemas.microsoft.com/office/drawing/2014/main" id="{A6B156FA-5567-4031-352C-CD1A5978F127}"/>
               </a:ext>
             </a:extLst>
           </p:cNvPr>
@@ -3062,7 +3062,7 @@
           <p:cNvPr id="3" name="テキスト プレースホルダー 2">
             <a:extLst>
               <a:ext uri="{FF2B5EF4-FFF2-40B4-BE49-F238E27FC236}">
-                <a16:creationId xmlns:a16="http://schemas.microsoft.com/office/drawing/2014/main" id="{9310314C-CB4E-BCD5-7462-55EEBCDAC49F}"/>
+                <a16:creationId xmlns:a16="http://schemas.microsoft.com/office/drawing/2014/main" id="{C1896050-C9C5-9B9B-46E1-2BD48FEE945F}"/>
               </a:ext>
             </a:extLst>
           </p:cNvPr>
@@ -3161,7 +3161,7 @@
           <p:cNvPr id="4" name="日付プレースホルダー 3">
             <a:extLst>
               <a:ext uri="{FF2B5EF4-FFF2-40B4-BE49-F238E27FC236}">
-                <a16:creationId xmlns:a16="http://schemas.microsoft.com/office/drawing/2014/main" id="{2EE6AD59-1D26-A467-FB3B-E66F19435B25}"/>
+                <a16:creationId xmlns:a16="http://schemas.microsoft.com/office/drawing/2014/main" id="{7E441966-B088-BB5F-64EE-05478F70AB74}"/>
               </a:ext>
             </a:extLst>
           </p:cNvPr>
@@ -3195,7 +3195,7 @@
             </a:lvl1pPr>
           </a:lstStyle>
           <a:p>
-            <a:fld id="{57300885-F7E3-44C8-81FD-6EEE2CA91821}" type="datetimeFigureOut">
+            <a:fld id="{FE270A2D-177A-41EB-8689-FF0085125FA0}" type="datetimeFigureOut">
               <a:rPr kumimoji="1" lang="ja-JP" altLang="en-US" smtClean="0"/>
               <a:t>2026/7/30</a:t>
             </a:fld>
@@ -3208,7 +3208,7 @@
           <p:cNvPr id="5" name="フッター プレースホルダー 4">
             <a:extLst>
               <a:ext uri="{FF2B5EF4-FFF2-40B4-BE49-F238E27FC236}">
-                <a16:creationId xmlns:a16="http://schemas.microsoft.com/office/drawing/2014/main" id="{949F4227-48B7-90E6-AC35-F781222DD898}"/>
+                <a16:creationId xmlns:a16="http://schemas.microsoft.com/office/drawing/2014/main" id="{BA6A019D-7F95-493D-2BAC-8F3C9088A142}"/>
               </a:ext>
             </a:extLst>
           </p:cNvPr>
@@ -3251,7 +3251,7 @@
           <p:cNvPr id="6" name="スライド番号プレースホルダー 5">
             <a:extLst>
               <a:ext uri="{FF2B5EF4-FFF2-40B4-BE49-F238E27FC236}">
-                <a16:creationId xmlns:a16="http://schemas.microsoft.com/office/drawing/2014/main" id="{7425E85C-4179-EB4C-5EFB-B6E39A2141AC}"/>
+                <a16:creationId xmlns:a16="http://schemas.microsoft.com/office/drawing/2014/main" id="{5D727473-F67D-7EF4-7973-DE77A696C9B6}"/>
               </a:ext>
             </a:extLst>
           </p:cNvPr>
@@ -3285,7 +3285,7 @@
             </a:lvl1pPr>
           </a:lstStyle>
           <a:p>
-            <a:fld id="{CA3C3399-F037-41EE-9269-792D2EBAF5B2}" type="slidenum">
+            <a:fld id="{5F55CA0D-5453-4F13-A461-CCCDD36BBF48}" type="slidenum">
               <a:rPr kumimoji="1" lang="ja-JP" altLang="en-US" smtClean="0"/>
               <a:t>‹#›</a:t>
             </a:fld>
@@ -3296,7 +3296,7 @@
     </p:spTree>
     <p:extLst>
       <p:ext uri="{BB962C8B-B14F-4D97-AF65-F5344CB8AC3E}">
-        <p14:creationId xmlns:p14="http://schemas.microsoft.com/office/powerpoint/2010/main" val="2692940107"/>
+        <p14:creationId xmlns:p14="http://schemas.microsoft.com/office/powerpoint/2010/main" val="2938952097"/>
       </p:ext>
     </p:extLst>
   </p:cSld>
@@ -3619,7 +3619,7 @@
           <p:cNvPr id="2" name="テキスト ボックス 1">
             <a:extLst>
               <a:ext uri="{FF2B5EF4-FFF2-40B4-BE49-F238E27FC236}">
-                <a16:creationId xmlns:a16="http://schemas.microsoft.com/office/drawing/2014/main" id="{923AD99A-9B89-CEE7-5D37-C558E7035007}"/>
+                <a16:creationId xmlns:a16="http://schemas.microsoft.com/office/drawing/2014/main" id="{6660962C-5AB0-5CA1-7890-831FA7046D6A}"/>
               </a:ext>
             </a:extLst>
           </p:cNvPr>
@@ -3665,7 +3665,7 @@
           <p:cNvPr id="3" name="テキスト ボックス 2">
             <a:extLst>
               <a:ext uri="{FF2B5EF4-FFF2-40B4-BE49-F238E27FC236}">
-                <a16:creationId xmlns:a16="http://schemas.microsoft.com/office/drawing/2014/main" id="{1ECBD02A-1DCE-39CE-6B88-B8D5E9AFFF8A}"/>
+                <a16:creationId xmlns:a16="http://schemas.microsoft.com/office/drawing/2014/main" id="{BA82B608-068C-84E3-B595-9CECD157473A}"/>
               </a:ext>
             </a:extLst>
           </p:cNvPr>
@@ -3714,7 +3714,7 @@
           <p:cNvPr id="4" name="テキスト ボックス 3">
             <a:extLst>
               <a:ext uri="{FF2B5EF4-FFF2-40B4-BE49-F238E27FC236}">
-                <a16:creationId xmlns:a16="http://schemas.microsoft.com/office/drawing/2014/main" id="{5ED71130-4BF1-BF44-8099-331158E6F5AC}"/>
+                <a16:creationId xmlns:a16="http://schemas.microsoft.com/office/drawing/2014/main" id="{9E6B4EEE-3120-EDAB-AC38-CA2C697B07C9}"/>
               </a:ext>
             </a:extLst>
           </p:cNvPr>
@@ -3754,7 +3754,7 @@
           <p:cNvPr id="5" name="テキスト ボックス 4">
             <a:extLst>
               <a:ext uri="{FF2B5EF4-FFF2-40B4-BE49-F238E27FC236}">
-                <a16:creationId xmlns:a16="http://schemas.microsoft.com/office/drawing/2014/main" id="{687142E4-85F8-AFCD-22CA-889CB98C51FA}"/>
+                <a16:creationId xmlns:a16="http://schemas.microsoft.com/office/drawing/2014/main" id="{8BB80086-0D51-8EE3-A19F-2824DDFC8B94}"/>
               </a:ext>
             </a:extLst>
           </p:cNvPr>
@@ -3801,7 +3801,7 @@
             <a:hlinkClick r:id="" action="ppaction://media"/>
             <a:extLst>
               <a:ext uri="{FF2B5EF4-FFF2-40B4-BE49-F238E27FC236}">
-                <a16:creationId xmlns:a16="http://schemas.microsoft.com/office/drawing/2014/main" id="{2763AF1E-4A88-6735-7BEB-D631742AAF7A}"/>
+                <a16:creationId xmlns:a16="http://schemas.microsoft.com/office/drawing/2014/main" id="{BCC645DA-03A3-08D1-9C5F-6615E2BB75BB}"/>
               </a:ext>
             </a:extLst>
           </p:cNvPr>
@@ -3836,7 +3836,7 @@
     </p:spTree>
     <p:extLst>
       <p:ext uri="{BB962C8B-B14F-4D97-AF65-F5344CB8AC3E}">
-        <p14:creationId xmlns:p14="http://schemas.microsoft.com/office/powerpoint/2010/main" val="1907510756"/>
+        <p14:creationId xmlns:p14="http://schemas.microsoft.com/office/powerpoint/2010/main" val="1739040541"/>
       </p:ext>
     </p:extLst>
   </p:cSld>
@@ -3960,7 +3960,7 @@
           <p:cNvPr id="2" name="テキスト ボックス 1">
             <a:extLst>
               <a:ext uri="{FF2B5EF4-FFF2-40B4-BE49-F238E27FC236}">
-                <a16:creationId xmlns:a16="http://schemas.microsoft.com/office/drawing/2014/main" id="{4D99AE30-D47A-E57B-A5F7-0F9E6B33459E}"/>
+                <a16:creationId xmlns:a16="http://schemas.microsoft.com/office/drawing/2014/main" id="{47A11A24-34A2-3D4E-1EB4-081B0C09B925}"/>
               </a:ext>
             </a:extLst>
           </p:cNvPr>
@@ -4006,7 +4006,7 @@
           <p:cNvPr id="3" name="テキスト ボックス 2">
             <a:extLst>
               <a:ext uri="{FF2B5EF4-FFF2-40B4-BE49-F238E27FC236}">
-                <a16:creationId xmlns:a16="http://schemas.microsoft.com/office/drawing/2014/main" id="{63A4B12F-92AA-FA25-B577-DDDEB1CC9FB7}"/>
+                <a16:creationId xmlns:a16="http://schemas.microsoft.com/office/drawing/2014/main" id="{C934C090-BBD6-19D0-F8DE-98C4C477FA54}"/>
               </a:ext>
             </a:extLst>
           </p:cNvPr>
@@ -4046,7 +4046,7 @@
           <p:cNvPr id="4" name="テキスト ボックス 3">
             <a:extLst>
               <a:ext uri="{FF2B5EF4-FFF2-40B4-BE49-F238E27FC236}">
-                <a16:creationId xmlns:a16="http://schemas.microsoft.com/office/drawing/2014/main" id="{C51BB763-C58A-4C95-23A6-361DB5BF040B}"/>
+                <a16:creationId xmlns:a16="http://schemas.microsoft.com/office/drawing/2014/main" id="{E7111658-3DA9-0806-E95F-E414BD640017}"/>
               </a:ext>
             </a:extLst>
           </p:cNvPr>
@@ -4076,14 +4076,17 @@
                 </a:solidFill>
                 <a:latin typeface="Arial" panose="020B0604020202020204" pitchFamily="34" charset="0"/>
               </a:rPr>
-              <a:t>About Laravel Laravel is a web application framework with expressive, elegant syntax</a:t>
-            </a:r>
-            <a:endParaRPr kumimoji="1" lang="ja-JP" altLang="en-US" sz="2000">
-              <a:solidFill>
-                <a:srgbClr val="333333"/>
-              </a:solidFill>
-              <a:latin typeface="Arial" panose="020B0604020202020204" pitchFamily="34" charset="0"/>
-            </a:endParaRPr>
+              <a:t>Wedding Hall Map</a:t>
+            </a:r>
+            <a:r>
+              <a:rPr kumimoji="1" lang="ja-JP" altLang="en-US" sz="2000">
+                <a:solidFill>
+                  <a:srgbClr val="333333"/>
+                </a:solidFill>
+                <a:latin typeface="Arial" panose="020B0604020202020204" pitchFamily="34" charset="0"/>
+              </a:rPr>
+              <a:t>の目的、構成、実装を公開コードから確認できるプロジェクトです。</a:t>
+            </a:r>
           </a:p>
         </p:txBody>
       </p:sp>
@@ -4092,7 +4095,7 @@
           <p:cNvPr id="5" name="テキスト ボックス 4">
             <a:extLst>
               <a:ext uri="{FF2B5EF4-FFF2-40B4-BE49-F238E27FC236}">
-                <a16:creationId xmlns:a16="http://schemas.microsoft.com/office/drawing/2014/main" id="{40A74A73-E0B4-5E06-BDE2-D9CA9377B6FA}"/>
+                <a16:creationId xmlns:a16="http://schemas.microsoft.com/office/drawing/2014/main" id="{E49F1CA0-7524-FEFE-E2D7-1646A1B268E7}"/>
               </a:ext>
             </a:extLst>
           </p:cNvPr>
@@ -4139,7 +4142,7 @@
             <a:hlinkClick r:id="" action="ppaction://media"/>
             <a:extLst>
               <a:ext uri="{FF2B5EF4-FFF2-40B4-BE49-F238E27FC236}">
-                <a16:creationId xmlns:a16="http://schemas.microsoft.com/office/drawing/2014/main" id="{AF71DBCD-EFCE-66A9-3F84-FD13236F0303}"/>
+                <a16:creationId xmlns:a16="http://schemas.microsoft.com/office/drawing/2014/main" id="{AD309164-6113-1398-7D2A-BCA11CCF0579}"/>
               </a:ext>
             </a:extLst>
           </p:cNvPr>
@@ -4174,7 +4177,7 @@
     </p:spTree>
     <p:extLst>
       <p:ext uri="{BB962C8B-B14F-4D97-AF65-F5344CB8AC3E}">
-        <p14:creationId xmlns:p14="http://schemas.microsoft.com/office/powerpoint/2010/main" val="1173400502"/>
+        <p14:creationId xmlns:p14="http://schemas.microsoft.com/office/powerpoint/2010/main" val="876122757"/>
       </p:ext>
     </p:extLst>
   </p:cSld>
@@ -4217,7 +4220,7 @@
                                   <p:childTnLst>
                                     <p:cmd type="call" cmd="playFrom(0.0)">
                                       <p:cBhvr>
-                                        <p:cTn id="6" dur="7780" fill="hold"/>
+                                        <p:cTn id="6" dur="7401" fill="hold"/>
                                         <p:tgtEl>
                                           <p:spTgt spid="6"/>
                                         </p:tgtEl>
@@ -4298,7 +4301,7 @@
           <p:cNvPr id="2" name="テキスト ボックス 1">
             <a:extLst>
               <a:ext uri="{FF2B5EF4-FFF2-40B4-BE49-F238E27FC236}">
-                <a16:creationId xmlns:a16="http://schemas.microsoft.com/office/drawing/2014/main" id="{F0E757DD-2F5F-E5CF-A23F-023462699A5E}"/>
+                <a16:creationId xmlns:a16="http://schemas.microsoft.com/office/drawing/2014/main" id="{18CB8E77-10C7-2A6C-53A1-3F47DBC13DAD}"/>
               </a:ext>
             </a:extLst>
           </p:cNvPr>
@@ -4344,7 +4347,7 @@
           <p:cNvPr id="3" name="テキスト ボックス 2">
             <a:extLst>
               <a:ext uri="{FF2B5EF4-FFF2-40B4-BE49-F238E27FC236}">
-                <a16:creationId xmlns:a16="http://schemas.microsoft.com/office/drawing/2014/main" id="{72DDDFD3-C26C-6FEB-0B40-6924EEA87717}"/>
+                <a16:creationId xmlns:a16="http://schemas.microsoft.com/office/drawing/2014/main" id="{C485148E-0C9D-AC80-0D66-A1456558BA3D}"/>
               </a:ext>
             </a:extLst>
           </p:cNvPr>
@@ -4384,7 +4387,7 @@
           <p:cNvPr id="4" name="テキスト ボックス 3">
             <a:extLst>
               <a:ext uri="{FF2B5EF4-FFF2-40B4-BE49-F238E27FC236}">
-                <a16:creationId xmlns:a16="http://schemas.microsoft.com/office/drawing/2014/main" id="{A38EF21B-32F9-2582-8CBD-3C28CC62B5E3}"/>
+                <a16:creationId xmlns:a16="http://schemas.microsoft.com/office/drawing/2014/main" id="{0195E679-51F8-88B1-59B1-95E5ED8D1CB8}"/>
               </a:ext>
             </a:extLst>
           </p:cNvPr>
@@ -4497,7 +4500,7 @@
           <p:cNvPr id="5" name="テキスト ボックス 4">
             <a:extLst>
               <a:ext uri="{FF2B5EF4-FFF2-40B4-BE49-F238E27FC236}">
-                <a16:creationId xmlns:a16="http://schemas.microsoft.com/office/drawing/2014/main" id="{87F2656D-BC6C-89D4-0EB4-76DB0049A19B}"/>
+                <a16:creationId xmlns:a16="http://schemas.microsoft.com/office/drawing/2014/main" id="{288850DC-9592-B78C-EAB9-6AF56D0B0EFD}"/>
               </a:ext>
             </a:extLst>
           </p:cNvPr>
@@ -4544,7 +4547,7 @@
             <a:hlinkClick r:id="" action="ppaction://media"/>
             <a:extLst>
               <a:ext uri="{FF2B5EF4-FFF2-40B4-BE49-F238E27FC236}">
-                <a16:creationId xmlns:a16="http://schemas.microsoft.com/office/drawing/2014/main" id="{3A9519B4-E7E4-6F19-D824-12E5EA1EC8B2}"/>
+                <a16:creationId xmlns:a16="http://schemas.microsoft.com/office/drawing/2014/main" id="{BFBEB780-7F20-B0C4-963C-2A036929D4B5}"/>
               </a:ext>
             </a:extLst>
           </p:cNvPr>
@@ -4579,7 +4582,7 @@
     </p:spTree>
     <p:extLst>
       <p:ext uri="{BB962C8B-B14F-4D97-AF65-F5344CB8AC3E}">
-        <p14:creationId xmlns:p14="http://schemas.microsoft.com/office/powerpoint/2010/main" val="2206697602"/>
+        <p14:creationId xmlns:p14="http://schemas.microsoft.com/office/powerpoint/2010/main" val="2932940871"/>
       </p:ext>
     </p:extLst>
   </p:cSld>
@@ -4703,7 +4706,7 @@
           <p:cNvPr id="2" name="テキスト ボックス 1">
             <a:extLst>
               <a:ext uri="{FF2B5EF4-FFF2-40B4-BE49-F238E27FC236}">
-                <a16:creationId xmlns:a16="http://schemas.microsoft.com/office/drawing/2014/main" id="{E16738A3-E699-FD55-0F3E-E4AC4FDD3982}"/>
+                <a16:creationId xmlns:a16="http://schemas.microsoft.com/office/drawing/2014/main" id="{03551CBD-8C51-3BEB-BC08-50E306C6B7AD}"/>
               </a:ext>
             </a:extLst>
           </p:cNvPr>
@@ -4749,7 +4752,7 @@
           <p:cNvPr id="3" name="テキスト ボックス 2">
             <a:extLst>
               <a:ext uri="{FF2B5EF4-FFF2-40B4-BE49-F238E27FC236}">
-                <a16:creationId xmlns:a16="http://schemas.microsoft.com/office/drawing/2014/main" id="{5B217D1C-7AFE-9714-0824-C3786EF47DCD}"/>
+                <a16:creationId xmlns:a16="http://schemas.microsoft.com/office/drawing/2014/main" id="{F95468E3-9475-6AA8-2C05-A1D49398A302}"/>
               </a:ext>
             </a:extLst>
           </p:cNvPr>
@@ -4789,7 +4792,7 @@
           <p:cNvPr id="4" name="テキスト ボックス 3">
             <a:extLst>
               <a:ext uri="{FF2B5EF4-FFF2-40B4-BE49-F238E27FC236}">
-                <a16:creationId xmlns:a16="http://schemas.microsoft.com/office/drawing/2014/main" id="{06BFC1D3-AF41-0849-F55E-939192B55AAC}"/>
+                <a16:creationId xmlns:a16="http://schemas.microsoft.com/office/drawing/2014/main" id="{8A598AF8-FD1F-2BD3-57A8-07812B84C98C}"/>
               </a:ext>
             </a:extLst>
           </p:cNvPr>
@@ -4899,7 +4902,7 @@
           <p:cNvPr id="5" name="テキスト ボックス 4">
             <a:extLst>
               <a:ext uri="{FF2B5EF4-FFF2-40B4-BE49-F238E27FC236}">
-                <a16:creationId xmlns:a16="http://schemas.microsoft.com/office/drawing/2014/main" id="{ED10D978-C690-FC1A-CA29-1F869C557270}"/>
+                <a16:creationId xmlns:a16="http://schemas.microsoft.com/office/drawing/2014/main" id="{88A2524C-FA64-9308-36F9-849A179ED4AC}"/>
               </a:ext>
             </a:extLst>
           </p:cNvPr>
@@ -4946,7 +4949,7 @@
             <a:hlinkClick r:id="" action="ppaction://media"/>
             <a:extLst>
               <a:ext uri="{FF2B5EF4-FFF2-40B4-BE49-F238E27FC236}">
-                <a16:creationId xmlns:a16="http://schemas.microsoft.com/office/drawing/2014/main" id="{66806C22-99EC-03FE-14E5-7A41F302816E}"/>
+                <a16:creationId xmlns:a16="http://schemas.microsoft.com/office/drawing/2014/main" id="{6D128800-FC81-A183-4F23-631A05244D27}"/>
               </a:ext>
             </a:extLst>
           </p:cNvPr>
@@ -4981,7 +4984,7 @@
     </p:spTree>
     <p:extLst>
       <p:ext uri="{BB962C8B-B14F-4D97-AF65-F5344CB8AC3E}">
-        <p14:creationId xmlns:p14="http://schemas.microsoft.com/office/powerpoint/2010/main" val="554691446"/>
+        <p14:creationId xmlns:p14="http://schemas.microsoft.com/office/powerpoint/2010/main" val="2499372231"/>
       </p:ext>
     </p:extLst>
   </p:cSld>
@@ -5105,7 +5108,7 @@
           <p:cNvPr id="2" name="テキスト ボックス 1">
             <a:extLst>
               <a:ext uri="{FF2B5EF4-FFF2-40B4-BE49-F238E27FC236}">
-                <a16:creationId xmlns:a16="http://schemas.microsoft.com/office/drawing/2014/main" id="{2BC47975-CB1F-6220-BDA3-A7F7549D1489}"/>
+                <a16:creationId xmlns:a16="http://schemas.microsoft.com/office/drawing/2014/main" id="{BC9F23FA-8FCC-5CB7-F155-49E5BD758D85}"/>
               </a:ext>
             </a:extLst>
           </p:cNvPr>
@@ -5151,7 +5154,7 @@
           <p:cNvPr id="3" name="テキスト ボックス 2">
             <a:extLst>
               <a:ext uri="{FF2B5EF4-FFF2-40B4-BE49-F238E27FC236}">
-                <a16:creationId xmlns:a16="http://schemas.microsoft.com/office/drawing/2014/main" id="{726114A3-9822-7DFA-C4D2-C4942F15BDDC}"/>
+                <a16:creationId xmlns:a16="http://schemas.microsoft.com/office/drawing/2014/main" id="{B5F57E0F-DF90-EE3D-54BE-02F2549A7419}"/>
               </a:ext>
             </a:extLst>
           </p:cNvPr>
@@ -5191,7 +5194,7 @@
           <p:cNvPr id="4" name="テキスト ボックス 3">
             <a:extLst>
               <a:ext uri="{FF2B5EF4-FFF2-40B4-BE49-F238E27FC236}">
-                <a16:creationId xmlns:a16="http://schemas.microsoft.com/office/drawing/2014/main" id="{2255D014-2793-880D-D116-BB613F12138F}"/>
+                <a16:creationId xmlns:a16="http://schemas.microsoft.com/office/drawing/2014/main" id="{8A1892FE-5CD1-98BC-4162-8F46217B2311}"/>
               </a:ext>
             </a:extLst>
           </p:cNvPr>
@@ -5221,25 +5224,7 @@
                 </a:solidFill>
                 <a:latin typeface="Arial" panose="020B0604020202020204" pitchFamily="34" charset="0"/>
               </a:rPr>
-              <a:t>結婚式場マップ（地図</a:t>
-            </a:r>
-            <a:r>
-              <a:rPr kumimoji="1" lang="en-US" altLang="ja-JP" sz="2000">
-                <a:solidFill>
-                  <a:srgbClr val="333333"/>
-                </a:solidFill>
-                <a:latin typeface="Arial" panose="020B0604020202020204" pitchFamily="34" charset="0"/>
-              </a:rPr>
-              <a:t>×UGC×LINE</a:t>
-            </a:r>
-            <a:r>
-              <a:rPr kumimoji="1" lang="ja-JP" altLang="en-US" sz="2000">
-                <a:solidFill>
-                  <a:srgbClr val="333333"/>
-                </a:solidFill>
-                <a:latin typeface="Arial" panose="020B0604020202020204" pitchFamily="34" charset="0"/>
-              </a:rPr>
-              <a:t>通知・資料請求）を新規構築</a:t>
+              <a:t>直近のコミットでは、実装の見直しと継続的な改善が行われました。</a:t>
             </a:r>
           </a:p>
         </p:txBody>
@@ -5249,7 +5234,7 @@
           <p:cNvPr id="5" name="テキスト ボックス 4">
             <a:extLst>
               <a:ext uri="{FF2B5EF4-FFF2-40B4-BE49-F238E27FC236}">
-                <a16:creationId xmlns:a16="http://schemas.microsoft.com/office/drawing/2014/main" id="{F2832F22-5DDD-B504-1B9F-C2C9A6D85F03}"/>
+                <a16:creationId xmlns:a16="http://schemas.microsoft.com/office/drawing/2014/main" id="{7FAA9749-6E64-B8AA-83C0-4D71CFFF2FC6}"/>
               </a:ext>
             </a:extLst>
           </p:cNvPr>
@@ -5296,7 +5281,7 @@
             <a:hlinkClick r:id="" action="ppaction://media"/>
             <a:extLst>
               <a:ext uri="{FF2B5EF4-FFF2-40B4-BE49-F238E27FC236}">
-                <a16:creationId xmlns:a16="http://schemas.microsoft.com/office/drawing/2014/main" id="{7725B6C7-89C3-28E3-83C9-E79E388AF864}"/>
+                <a16:creationId xmlns:a16="http://schemas.microsoft.com/office/drawing/2014/main" id="{D067D994-D062-9B1F-A855-4F9D2B1F5229}"/>
               </a:ext>
             </a:extLst>
           </p:cNvPr>
@@ -5331,7 +5316,7 @@
     </p:spTree>
     <p:extLst>
       <p:ext uri="{BB962C8B-B14F-4D97-AF65-F5344CB8AC3E}">
-        <p14:creationId xmlns:p14="http://schemas.microsoft.com/office/powerpoint/2010/main" val="3271711619"/>
+        <p14:creationId xmlns:p14="http://schemas.microsoft.com/office/powerpoint/2010/main" val="256124413"/>
       </p:ext>
     </p:extLst>
   </p:cSld>
@@ -5340,10 +5325,10 @@
   </p:clrMapOvr>
   <mc:AlternateContent xmlns:mc="http://schemas.openxmlformats.org/markup-compatibility/2006">
     <mc:Choice xmlns:p14="http://schemas.microsoft.com/office/powerpoint/2010/main" Requires="p14">
-      <p:transition spd="slow" p14:dur="2000" advTm="12000"/>
+      <p:transition spd="slow" p14:dur="2000" advTm="7000"/>
     </mc:Choice>
     <mc:Fallback>
-      <p:transition spd="slow" advTm="12000"/>
+      <p:transition spd="slow" advTm="7000"/>
     </mc:Fallback>
   </mc:AlternateContent>
   <p:timing>
@@ -5374,7 +5359,7 @@
                                   <p:childTnLst>
                                     <p:cmd type="call" cmd="playFrom(0.0)">
                                       <p:cBhvr>
-                                        <p:cTn id="6" dur="11554" fill="hold"/>
+                                        <p:cTn id="6" dur="6076" fill="hold"/>
                                         <p:tgtEl>
                                           <p:spTgt spid="6"/>
                                         </p:tgtEl>
@@ -5455,7 +5440,7 @@
           <p:cNvPr id="2" name="テキスト ボックス 1">
             <a:extLst>
               <a:ext uri="{FF2B5EF4-FFF2-40B4-BE49-F238E27FC236}">
-                <a16:creationId xmlns:a16="http://schemas.microsoft.com/office/drawing/2014/main" id="{5DDCDDA7-ED3E-1ADA-72E8-DACAF4AEA293}"/>
+                <a16:creationId xmlns:a16="http://schemas.microsoft.com/office/drawing/2014/main" id="{C4BE7B26-4A64-60CA-3F1F-14C1DED36E9D}"/>
               </a:ext>
             </a:extLst>
           </p:cNvPr>
@@ -5501,7 +5486,7 @@
           <p:cNvPr id="3" name="テキスト ボックス 2">
             <a:extLst>
               <a:ext uri="{FF2B5EF4-FFF2-40B4-BE49-F238E27FC236}">
-                <a16:creationId xmlns:a16="http://schemas.microsoft.com/office/drawing/2014/main" id="{D85B2C09-E4E0-6C9F-2B72-4A3EEBAFCF58}"/>
+                <a16:creationId xmlns:a16="http://schemas.microsoft.com/office/drawing/2014/main" id="{7D86A1BB-2C54-6FB2-2BE9-311850348BDF}"/>
               </a:ext>
             </a:extLst>
           </p:cNvPr>
@@ -5541,7 +5526,7 @@
           <p:cNvPr id="4" name="テキスト ボックス 3">
             <a:extLst>
               <a:ext uri="{FF2B5EF4-FFF2-40B4-BE49-F238E27FC236}">
-                <a16:creationId xmlns:a16="http://schemas.microsoft.com/office/drawing/2014/main" id="{624111A3-2135-E192-E5B4-5852F6FF1437}"/>
+                <a16:creationId xmlns:a16="http://schemas.microsoft.com/office/drawing/2014/main" id="{B9B0DFC0-A530-21D6-EA67-6C5198E7BADF}"/>
               </a:ext>
             </a:extLst>
           </p:cNvPr>
@@ -5606,7 +5591,7 @@
           <p:cNvPr id="5" name="テキスト ボックス 4">
             <a:extLst>
               <a:ext uri="{FF2B5EF4-FFF2-40B4-BE49-F238E27FC236}">
-                <a16:creationId xmlns:a16="http://schemas.microsoft.com/office/drawing/2014/main" id="{A1A0BEDB-6ADE-CDDB-89A9-F55EE5F13AA5}"/>
+                <a16:creationId xmlns:a16="http://schemas.microsoft.com/office/drawing/2014/main" id="{64A29C2A-EB3B-CE83-2468-CF0A32C02935}"/>
               </a:ext>
             </a:extLst>
           </p:cNvPr>
@@ -5653,7 +5638,7 @@
             <a:hlinkClick r:id="" action="ppaction://media"/>
             <a:extLst>
               <a:ext uri="{FF2B5EF4-FFF2-40B4-BE49-F238E27FC236}">
-                <a16:creationId xmlns:a16="http://schemas.microsoft.com/office/drawing/2014/main" id="{2C57CD3A-8E58-413F-4D68-B2B0A27269B6}"/>
+                <a16:creationId xmlns:a16="http://schemas.microsoft.com/office/drawing/2014/main" id="{7BEC7A91-DA3A-C559-51A9-66C5EAF39907}"/>
               </a:ext>
             </a:extLst>
           </p:cNvPr>
@@ -5688,7 +5673,7 @@
     </p:spTree>
     <p:extLst>
       <p:ext uri="{BB962C8B-B14F-4D97-AF65-F5344CB8AC3E}">
-        <p14:creationId xmlns:p14="http://schemas.microsoft.com/office/powerpoint/2010/main" val="767169412"/>
+        <p14:creationId xmlns:p14="http://schemas.microsoft.com/office/powerpoint/2010/main" val="3321241116"/>
       </p:ext>
     </p:extLst>
   </p:cSld>
